--- a/clases/Cap00_Lineas_Generales/program/PAT00_PresentacionCurso.pptx
+++ b/clases/Cap00_Lineas_Generales/program/PAT00_PresentacionCurso.pptx
@@ -220,7 +220,7 @@
           <a:p>
             <a:fld id="{1249748F-0FE7-C64C-B0B9-9306A54D4824}" type="datetimeFigureOut">
               <a:rPr lang="en-CL" smtClean="0"/>
-              <a:t>11-03-26</a:t>
+              <a:t>12-03-26</a:t>
             </a:fld>
             <a:endParaRPr lang="en-CL"/>
           </a:p>
@@ -2417,7 +2417,7 @@
           <a:p>
             <a:fld id="{2C457589-72F1-974D-B204-6AE212262628}" type="datetimeFigureOut">
               <a:rPr lang="en-CL" smtClean="0"/>
-              <a:t>11-03-26</a:t>
+              <a:t>12-03-26</a:t>
             </a:fld>
             <a:endParaRPr lang="en-CL"/>
           </a:p>
@@ -2617,7 +2617,7 @@
           <a:p>
             <a:fld id="{2C457589-72F1-974D-B204-6AE212262628}" type="datetimeFigureOut">
               <a:rPr lang="en-CL" smtClean="0"/>
-              <a:t>11-03-26</a:t>
+              <a:t>12-03-26</a:t>
             </a:fld>
             <a:endParaRPr lang="en-CL"/>
           </a:p>
@@ -2827,7 +2827,7 @@
           <a:p>
             <a:fld id="{2C457589-72F1-974D-B204-6AE212262628}" type="datetimeFigureOut">
               <a:rPr lang="en-CL" smtClean="0"/>
-              <a:t>11-03-26</a:t>
+              <a:t>12-03-26</a:t>
             </a:fld>
             <a:endParaRPr lang="en-CL"/>
           </a:p>
@@ -3027,7 +3027,7 @@
           <a:p>
             <a:fld id="{2C457589-72F1-974D-B204-6AE212262628}" type="datetimeFigureOut">
               <a:rPr lang="en-CL" smtClean="0"/>
-              <a:t>11-03-26</a:t>
+              <a:t>12-03-26</a:t>
             </a:fld>
             <a:endParaRPr lang="en-CL"/>
           </a:p>
@@ -3303,7 +3303,7 @@
           <a:p>
             <a:fld id="{2C457589-72F1-974D-B204-6AE212262628}" type="datetimeFigureOut">
               <a:rPr lang="en-CL" smtClean="0"/>
-              <a:t>11-03-26</a:t>
+              <a:t>12-03-26</a:t>
             </a:fld>
             <a:endParaRPr lang="en-CL"/>
           </a:p>
@@ -3571,7 +3571,7 @@
           <a:p>
             <a:fld id="{2C457589-72F1-974D-B204-6AE212262628}" type="datetimeFigureOut">
               <a:rPr lang="en-CL" smtClean="0"/>
-              <a:t>11-03-26</a:t>
+              <a:t>12-03-26</a:t>
             </a:fld>
             <a:endParaRPr lang="en-CL"/>
           </a:p>
@@ -3986,7 +3986,7 @@
           <a:p>
             <a:fld id="{2C457589-72F1-974D-B204-6AE212262628}" type="datetimeFigureOut">
               <a:rPr lang="en-CL" smtClean="0"/>
-              <a:t>11-03-26</a:t>
+              <a:t>12-03-26</a:t>
             </a:fld>
             <a:endParaRPr lang="en-CL"/>
           </a:p>
@@ -4128,7 +4128,7 @@
           <a:p>
             <a:fld id="{2C457589-72F1-974D-B204-6AE212262628}" type="datetimeFigureOut">
               <a:rPr lang="en-CL" smtClean="0"/>
-              <a:t>11-03-26</a:t>
+              <a:t>12-03-26</a:t>
             </a:fld>
             <a:endParaRPr lang="en-CL"/>
           </a:p>
@@ -4241,7 +4241,7 @@
           <a:p>
             <a:fld id="{2C457589-72F1-974D-B204-6AE212262628}" type="datetimeFigureOut">
               <a:rPr lang="en-CL" smtClean="0"/>
-              <a:t>11-03-26</a:t>
+              <a:t>12-03-26</a:t>
             </a:fld>
             <a:endParaRPr lang="en-CL"/>
           </a:p>
@@ -4554,7 +4554,7 @@
           <a:p>
             <a:fld id="{2C457589-72F1-974D-B204-6AE212262628}" type="datetimeFigureOut">
               <a:rPr lang="en-CL" smtClean="0"/>
-              <a:t>11-03-26</a:t>
+              <a:t>12-03-26</a:t>
             </a:fld>
             <a:endParaRPr lang="en-CL"/>
           </a:p>
@@ -4843,7 +4843,7 @@
           <a:p>
             <a:fld id="{2C457589-72F1-974D-B204-6AE212262628}" type="datetimeFigureOut">
               <a:rPr lang="en-CL" smtClean="0"/>
-              <a:t>11-03-26</a:t>
+              <a:t>12-03-26</a:t>
             </a:fld>
             <a:endParaRPr lang="en-CL"/>
           </a:p>
@@ -5086,7 +5086,7 @@
           <a:p>
             <a:fld id="{2C457589-72F1-974D-B204-6AE212262628}" type="datetimeFigureOut">
               <a:rPr lang="en-CL" smtClean="0"/>
-              <a:t>11-03-26</a:t>
+              <a:t>12-03-26</a:t>
             </a:fld>
             <a:endParaRPr lang="en-CL"/>
           </a:p>
@@ -6099,6 +6099,68 @@
           </a:p>
         </p:txBody>
       </p:sp>
+      <p:pic>
+        <p:nvPicPr>
+          <p:cNvPr id="5" name="Picture 4" descr="A close-up of a document&#10;&#10;AI-generated content may be incorrect.">
+            <a:extLst>
+              <a:ext uri="{FF2B5EF4-FFF2-40B4-BE49-F238E27FC236}">
+                <a16:creationId xmlns:a16="http://schemas.microsoft.com/office/drawing/2014/main" id="{53D4AA79-91DC-DD9F-9FD4-D031B73559A2}"/>
+              </a:ext>
+            </a:extLst>
+          </p:cNvPr>
+          <p:cNvPicPr>
+            <a:picLocks noChangeAspect="1"/>
+          </p:cNvPicPr>
+          <p:nvPr/>
+        </p:nvPicPr>
+        <p:blipFill>
+          <a:blip r:embed="rId5"/>
+          <a:stretch>
+            <a:fillRect/>
+          </a:stretch>
+        </p:blipFill>
+        <p:spPr>
+          <a:xfrm rot="364845">
+            <a:off x="7347329" y="2364783"/>
+            <a:ext cx="2959782" cy="3973283"/>
+          </a:xfrm>
+          <a:prstGeom prst="rect">
+            <a:avLst/>
+          </a:prstGeom>
+          <a:solidFill>
+            <a:srgbClr val="FFFFFF">
+              <a:shade val="85000"/>
+            </a:srgbClr>
+          </a:solidFill>
+          <a:ln w="101600" cap="sq">
+            <a:solidFill>
+              <a:srgbClr val="FDFDFD"/>
+            </a:solidFill>
+            <a:miter lim="800000"/>
+          </a:ln>
+          <a:effectLst>
+            <a:outerShdw blurRad="57150" dist="37500" dir="7560000" sy="98000" kx="110000" ky="200000" algn="tl" rotWithShape="0">
+              <a:srgbClr val="000000">
+                <a:alpha val="20000"/>
+              </a:srgbClr>
+            </a:outerShdw>
+          </a:effectLst>
+          <a:scene3d>
+            <a:camera prst="perspectiveRelaxed">
+              <a:rot lat="18960000" lon="0" rev="0"/>
+            </a:camera>
+            <a:lightRig rig="twoPt" dir="t">
+              <a:rot lat="0" lon="0" rev="7200000"/>
+            </a:lightRig>
+          </a:scene3d>
+          <a:sp3d prstMaterial="matte">
+            <a:bevelT w="22860" h="12700"/>
+            <a:contourClr>
+              <a:srgbClr val="FFFFFF"/>
+            </a:contourClr>
+          </a:sp3d>
+        </p:spPr>
+      </p:pic>
     </p:spTree>
     <p:extLst>
       <p:ext uri="{BB962C8B-B14F-4D97-AF65-F5344CB8AC3E}">
@@ -8000,18 +8062,6 @@
   <p:clrMapOvr>
     <a:masterClrMapping/>
   </p:clrMapOvr>
-  <mc:AlternateContent xmlns:mc="http://schemas.openxmlformats.org/markup-compatibility/2006" xmlns:p159="http://schemas.microsoft.com/office/powerpoint/2015/09/main">
-    <mc:Choice Requires="p159">
-      <p:transition xmlns:p14="http://schemas.microsoft.com/office/powerpoint/2010/main" spd="slow" p14:dur="2000">
-        <p159:morph option="byObject"/>
-      </p:transition>
-    </mc:Choice>
-    <mc:Fallback xmlns="">
-      <p:transition spd="slow">
-        <p:fade/>
-      </p:transition>
-    </mc:Fallback>
-  </mc:AlternateContent>
 </p:sld>
 </file>
 
